--- a/assets/Figures.pptx
+++ b/assets/Figures.pptx
@@ -220,7 +220,7 @@
           <a:p>
             <a:fld id="{2F1859D8-B66A-47F9-B914-23B1751CA91A}" type="datetimeFigureOut">
               <a:rPr lang="en-US" smtClean="0"/>
-              <a:t>3/11/26</a:t>
+              <a:t>3/14/26</a:t>
             </a:fld>
             <a:endParaRPr lang="en-US"/>
           </a:p>
@@ -919,7 +919,7 @@
           <a:p>
             <a:fld id="{A2B6AD91-4B23-4744-80DD-8D3955A9F328}" type="datetimeFigureOut">
               <a:rPr lang="en-US" smtClean="0"/>
-              <a:t>3/11/26</a:t>
+              <a:t>3/14/26</a:t>
             </a:fld>
             <a:endParaRPr lang="en-US"/>
           </a:p>
@@ -1089,7 +1089,7 @@
           <a:p>
             <a:fld id="{A2B6AD91-4B23-4744-80DD-8D3955A9F328}" type="datetimeFigureOut">
               <a:rPr lang="en-US" smtClean="0"/>
-              <a:t>3/11/26</a:t>
+              <a:t>3/14/26</a:t>
             </a:fld>
             <a:endParaRPr lang="en-US"/>
           </a:p>
@@ -1269,7 +1269,7 @@
           <a:p>
             <a:fld id="{A2B6AD91-4B23-4744-80DD-8D3955A9F328}" type="datetimeFigureOut">
               <a:rPr lang="en-US" smtClean="0"/>
-              <a:t>3/11/26</a:t>
+              <a:t>3/14/26</a:t>
             </a:fld>
             <a:endParaRPr lang="en-US"/>
           </a:p>
@@ -1439,7 +1439,7 @@
           <a:p>
             <a:fld id="{A2B6AD91-4B23-4744-80DD-8D3955A9F328}" type="datetimeFigureOut">
               <a:rPr lang="en-US" smtClean="0"/>
-              <a:t>3/11/26</a:t>
+              <a:t>3/14/26</a:t>
             </a:fld>
             <a:endParaRPr lang="en-US"/>
           </a:p>
@@ -1685,7 +1685,7 @@
           <a:p>
             <a:fld id="{A2B6AD91-4B23-4744-80DD-8D3955A9F328}" type="datetimeFigureOut">
               <a:rPr lang="en-US" smtClean="0"/>
-              <a:t>3/11/26</a:t>
+              <a:t>3/14/26</a:t>
             </a:fld>
             <a:endParaRPr lang="en-US"/>
           </a:p>
@@ -1917,7 +1917,7 @@
           <a:p>
             <a:fld id="{A2B6AD91-4B23-4744-80DD-8D3955A9F328}" type="datetimeFigureOut">
               <a:rPr lang="en-US" smtClean="0"/>
-              <a:t>3/11/26</a:t>
+              <a:t>3/14/26</a:t>
             </a:fld>
             <a:endParaRPr lang="en-US"/>
           </a:p>
@@ -2284,7 +2284,7 @@
           <a:p>
             <a:fld id="{A2B6AD91-4B23-4744-80DD-8D3955A9F328}" type="datetimeFigureOut">
               <a:rPr lang="en-US" smtClean="0"/>
-              <a:t>3/11/26</a:t>
+              <a:t>3/14/26</a:t>
             </a:fld>
             <a:endParaRPr lang="en-US"/>
           </a:p>
@@ -2402,7 +2402,7 @@
           <a:p>
             <a:fld id="{A2B6AD91-4B23-4744-80DD-8D3955A9F328}" type="datetimeFigureOut">
               <a:rPr lang="en-US" smtClean="0"/>
-              <a:t>3/11/26</a:t>
+              <a:t>3/14/26</a:t>
             </a:fld>
             <a:endParaRPr lang="en-US"/>
           </a:p>
@@ -2497,7 +2497,7 @@
           <a:p>
             <a:fld id="{A2B6AD91-4B23-4744-80DD-8D3955A9F328}" type="datetimeFigureOut">
               <a:rPr lang="en-US" smtClean="0"/>
-              <a:t>3/11/26</a:t>
+              <a:t>3/14/26</a:t>
             </a:fld>
             <a:endParaRPr lang="en-US"/>
           </a:p>
@@ -2774,7 +2774,7 @@
           <a:p>
             <a:fld id="{A2B6AD91-4B23-4744-80DD-8D3955A9F328}" type="datetimeFigureOut">
               <a:rPr lang="en-US" smtClean="0"/>
-              <a:t>3/11/26</a:t>
+              <a:t>3/14/26</a:t>
             </a:fld>
             <a:endParaRPr lang="en-US"/>
           </a:p>
@@ -3031,7 +3031,7 @@
           <a:p>
             <a:fld id="{A2B6AD91-4B23-4744-80DD-8D3955A9F328}" type="datetimeFigureOut">
               <a:rPr lang="en-US" smtClean="0"/>
-              <a:t>3/11/26</a:t>
+              <a:t>3/14/26</a:t>
             </a:fld>
             <a:endParaRPr lang="en-US"/>
           </a:p>
@@ -3244,7 +3244,7 @@
           <a:p>
             <a:fld id="{A2B6AD91-4B23-4744-80DD-8D3955A9F328}" type="datetimeFigureOut">
               <a:rPr lang="en-US" smtClean="0"/>
-              <a:t>3/11/26</a:t>
+              <a:t>3/14/26</a:t>
             </a:fld>
             <a:endParaRPr lang="en-US"/>
           </a:p>
@@ -4127,8 +4127,8 @@
           </a:fontRef>
         </p:style>
       </p:cxnSp>
-      <mc:AlternateContent xmlns:mc="http://schemas.openxmlformats.org/markup-compatibility/2006" xmlns:a14="http://schemas.microsoft.com/office/drawing/2010/main">
-        <mc:Choice Requires="a14">
+      <mc:AlternateContent xmlns:mc="http://schemas.openxmlformats.org/markup-compatibility/2006">
+        <mc:Choice xmlns:a14="http://schemas.microsoft.com/office/drawing/2010/main" Requires="a14">
           <p:sp>
             <p:nvSpPr>
               <p:cNvPr id="134" name="Rectangle 133">
@@ -4254,15 +4254,40 @@
               <a:p>
                 <a14:m>
                   <m:oMath xmlns:m="http://schemas.openxmlformats.org/officeDocument/2006/math">
-                    <m:r>
-                      <a:rPr lang="en-US" sz="1600" b="0" i="1" smtClean="0">
-                        <a:solidFill>
-                          <a:prstClr val="black"/>
-                        </a:solidFill>
-                        <a:latin typeface="Cambria Math" panose="02040503050406030204" pitchFamily="18" charset="0"/>
-                      </a:rPr>
-                      <m:t>𝑦</m:t>
-                    </m:r>
+                    <m:sSub>
+                      <m:sSubPr>
+                        <m:ctrlPr>
+                          <a:rPr lang="en-US" sz="1600" b="0" i="1" smtClean="0">
+                            <a:solidFill>
+                              <a:prstClr val="black"/>
+                            </a:solidFill>
+                            <a:latin typeface="Cambria Math" panose="02040503050406030204" pitchFamily="18" charset="0"/>
+                          </a:rPr>
+                        </m:ctrlPr>
+                      </m:sSubPr>
+                      <m:e>
+                        <m:r>
+                          <a:rPr lang="en-US" sz="1600" b="0" i="1" smtClean="0">
+                            <a:solidFill>
+                              <a:prstClr val="black"/>
+                            </a:solidFill>
+                            <a:latin typeface="Cambria Math" panose="02040503050406030204" pitchFamily="18" charset="0"/>
+                          </a:rPr>
+                          <m:t>𝑦</m:t>
+                        </m:r>
+                      </m:e>
+                      <m:sub>
+                        <m:r>
+                          <a:rPr lang="en-US" sz="1600" b="0" i="1" smtClean="0">
+                            <a:solidFill>
+                              <a:prstClr val="black"/>
+                            </a:solidFill>
+                            <a:latin typeface="Cambria Math" panose="02040503050406030204" pitchFamily="18" charset="0"/>
+                          </a:rPr>
+                          <m:t>𝑛</m:t>
+                        </m:r>
+                      </m:sub>
+                    </m:sSub>
                   </m:oMath>
                 </a14:m>
                 <a:r>
@@ -4386,7 +4411,7 @@
             </p:txBody>
           </p:sp>
         </mc:Choice>
-        <mc:Fallback xmlns="">
+        <mc:Fallback>
           <p:sp>
             <p:nvSpPr>
               <p:cNvPr id="134" name="Rectangle 133">
@@ -5743,8 +5768,8 @@
           </a:fontRef>
         </p:style>
       </p:cxnSp>
-      <mc:AlternateContent xmlns:mc="http://schemas.openxmlformats.org/markup-compatibility/2006" xmlns:a14="http://schemas.microsoft.com/office/drawing/2010/main">
-        <mc:Choice Requires="a14">
+      <mc:AlternateContent xmlns:mc="http://schemas.openxmlformats.org/markup-compatibility/2006">
+        <mc:Choice xmlns:a14="http://schemas.microsoft.com/office/drawing/2010/main" Requires="a14">
           <p:sp>
             <p:nvSpPr>
               <p:cNvPr id="125" name="TextBox 124">
@@ -5813,7 +5838,7 @@
                             <a:rPr lang="en-US" b="0" i="1" dirty="0" smtClean="0">
                               <a:latin typeface="Cambria Math" panose="02040503050406030204" pitchFamily="18" charset="0"/>
                             </a:rPr>
-                            <m:t>𝑘</m:t>
+                            <m:t>𝑛</m:t>
                           </m:r>
                         </m:sub>
                       </m:sSub>
@@ -5900,12 +5925,12 @@
                     </m:oMath>
                   </m:oMathPara>
                 </a14:m>
-                <a:endParaRPr/>
+                <a:endParaRPr dirty="0"/>
               </a:p>
             </p:txBody>
           </p:sp>
         </mc:Choice>
-        <mc:Fallback xmlns="">
+        <mc:Fallback>
           <p:sp>
             <p:nvSpPr>
               <p:cNvPr id="125" name="TextBox 124">
@@ -5931,7 +5956,7 @@
               <a:blipFill>
                 <a:blip r:embed="rId8"/>
                 <a:stretch>
-                  <a:fillRect t="-6667" r="-54839" b="-26667"/>
+                  <a:fillRect r="-47312" b="-13333"/>
                 </a:stretch>
               </a:blipFill>
             </p:spPr>
@@ -6770,8 +6795,8 @@
           </a:p>
         </p:txBody>
       </p:sp>
-      <mc:AlternateContent xmlns:mc="http://schemas.openxmlformats.org/markup-compatibility/2006">
-        <mc:Choice xmlns:a14="http://schemas.microsoft.com/office/drawing/2010/main" Requires="a14">
+      <mc:AlternateContent xmlns:mc="http://schemas.openxmlformats.org/markup-compatibility/2006" xmlns:a14="http://schemas.microsoft.com/office/drawing/2010/main">
+        <mc:Choice Requires="a14">
           <p:sp>
             <p:nvSpPr>
               <p:cNvPr id="18" name="Rectangle 770">
@@ -6878,7 +6903,7 @@
             </p:txBody>
           </p:sp>
         </mc:Choice>
-        <mc:Fallback>
+        <mc:Fallback xmlns="">
           <p:sp>
             <p:nvSpPr>
               <p:cNvPr id="18" name="Rectangle 770">
@@ -7685,8 +7710,8 @@
           </a:p>
         </p:txBody>
       </p:sp>
-      <mc:AlternateContent xmlns:mc="http://schemas.openxmlformats.org/markup-compatibility/2006">
-        <mc:Choice xmlns:a14="http://schemas.microsoft.com/office/drawing/2010/main" Requires="a14">
+      <mc:AlternateContent xmlns:mc="http://schemas.openxmlformats.org/markup-compatibility/2006" xmlns:a14="http://schemas.microsoft.com/office/drawing/2010/main">
+        <mc:Choice Requires="a14">
           <p:sp>
             <p:nvSpPr>
               <p:cNvPr id="18" name="Rectangle 770">
@@ -8425,7 +8450,7 @@
             </p:txBody>
           </p:sp>
         </mc:Choice>
-        <mc:Fallback>
+        <mc:Fallback xmlns="">
           <p:sp>
             <p:nvSpPr>
               <p:cNvPr id="18" name="Rectangle 770">
@@ -8470,8 +8495,8 @@
           </p:sp>
         </mc:Fallback>
       </mc:AlternateContent>
-      <mc:AlternateContent xmlns:mc="http://schemas.openxmlformats.org/markup-compatibility/2006">
-        <mc:Choice xmlns:a14="http://schemas.microsoft.com/office/drawing/2010/main" Requires="a14">
+      <mc:AlternateContent xmlns:mc="http://schemas.openxmlformats.org/markup-compatibility/2006" xmlns:a14="http://schemas.microsoft.com/office/drawing/2010/main">
+        <mc:Choice Requires="a14">
           <p:sp>
             <p:nvSpPr>
               <p:cNvPr id="31" name="TextBox 30">
@@ -8583,7 +8608,7 @@
             </p:txBody>
           </p:sp>
         </mc:Choice>
-        <mc:Fallback>
+        <mc:Fallback xmlns="">
           <p:sp>
             <p:nvSpPr>
               <p:cNvPr id="31" name="TextBox 30">
@@ -8712,8 +8737,8 @@
           </a:p>
         </p:txBody>
       </p:sp>
-      <mc:AlternateContent xmlns:mc="http://schemas.openxmlformats.org/markup-compatibility/2006">
-        <mc:Choice xmlns:a14="http://schemas.microsoft.com/office/drawing/2010/main" Requires="a14">
+      <mc:AlternateContent xmlns:mc="http://schemas.openxmlformats.org/markup-compatibility/2006" xmlns:a14="http://schemas.microsoft.com/office/drawing/2010/main">
+        <mc:Choice Requires="a14">
           <p:sp>
             <p:nvSpPr>
               <p:cNvPr id="58" name="Rectángulo 719">
@@ -9101,7 +9126,7 @@
             </p:txBody>
           </p:sp>
         </mc:Choice>
-        <mc:Fallback>
+        <mc:Fallback xmlns="">
           <p:sp>
             <p:nvSpPr>
               <p:cNvPr id="58" name="Rectángulo 719">
@@ -9146,8 +9171,8 @@
           </p:sp>
         </mc:Fallback>
       </mc:AlternateContent>
-      <mc:AlternateContent xmlns:mc="http://schemas.openxmlformats.org/markup-compatibility/2006">
-        <mc:Choice xmlns:a14="http://schemas.microsoft.com/office/drawing/2010/main" Requires="a14">
+      <mc:AlternateContent xmlns:mc="http://schemas.openxmlformats.org/markup-compatibility/2006" xmlns:a14="http://schemas.microsoft.com/office/drawing/2010/main">
+        <mc:Choice Requires="a14">
           <p:sp>
             <p:nvSpPr>
               <p:cNvPr id="75" name="Rectángulo 719">
@@ -9630,7 +9655,7 @@
             </p:txBody>
           </p:sp>
         </mc:Choice>
-        <mc:Fallback>
+        <mc:Fallback xmlns="">
           <p:sp>
             <p:nvSpPr>
               <p:cNvPr id="75" name="Rectángulo 719">
@@ -9675,8 +9700,8 @@
           </p:sp>
         </mc:Fallback>
       </mc:AlternateContent>
-      <mc:AlternateContent xmlns:mc="http://schemas.openxmlformats.org/markup-compatibility/2006">
-        <mc:Choice xmlns:a14="http://schemas.microsoft.com/office/drawing/2010/main" Requires="a14">
+      <mc:AlternateContent xmlns:mc="http://schemas.openxmlformats.org/markup-compatibility/2006" xmlns:a14="http://schemas.microsoft.com/office/drawing/2010/main">
+        <mc:Choice Requires="a14">
           <p:sp>
             <p:nvSpPr>
               <p:cNvPr id="89" name="Rectángulo 719">
@@ -10036,7 +10061,7 @@
             </p:txBody>
           </p:sp>
         </mc:Choice>
-        <mc:Fallback>
+        <mc:Fallback xmlns="">
           <p:sp>
             <p:nvSpPr>
               <p:cNvPr id="89" name="Rectángulo 719">
@@ -10175,8 +10200,8 @@
           </a:fontRef>
         </p:style>
       </p:cxnSp>
-      <mc:AlternateContent xmlns:mc="http://schemas.openxmlformats.org/markup-compatibility/2006">
-        <mc:Choice xmlns:a14="http://schemas.microsoft.com/office/drawing/2010/main" Requires="a14">
+      <mc:AlternateContent xmlns:mc="http://schemas.openxmlformats.org/markup-compatibility/2006" xmlns:a14="http://schemas.microsoft.com/office/drawing/2010/main">
+        <mc:Choice Requires="a14">
           <p:sp>
             <p:nvSpPr>
               <p:cNvPr id="116" name="Rectángulo 719">
@@ -10925,16 +10950,7 @@
                                   </a:solidFill>
                                   <a:latin typeface="Cambria Math" panose="02040503050406030204" pitchFamily="18" charset="0"/>
                                 </a:rPr>
-                                <m:t>0</m:t>
-                              </m:r>
-                              <m:r>
-                                <a:rPr lang="en-US" sz="1600" i="1" dirty="0">
-                                  <a:solidFill>
-                                    <a:schemeClr val="tx1"/>
-                                  </a:solidFill>
-                                  <a:latin typeface="Cambria Math" panose="02040503050406030204" pitchFamily="18" charset="0"/>
-                                </a:rPr>
-                                <m:t>:</m:t>
+                                <m:t>0:</m:t>
                               </m:r>
                               <m:r>
                                 <a:rPr lang="en-US" sz="1600" i="1" dirty="0">
@@ -11283,7 +11299,7 @@
             </p:txBody>
           </p:sp>
         </mc:Choice>
-        <mc:Fallback>
+        <mc:Fallback xmlns="">
           <p:sp>
             <p:nvSpPr>
               <p:cNvPr id="116" name="Rectángulo 719">
@@ -11328,8 +11344,8 @@
           </p:sp>
         </mc:Fallback>
       </mc:AlternateContent>
-      <mc:AlternateContent xmlns:mc="http://schemas.openxmlformats.org/markup-compatibility/2006">
-        <mc:Choice xmlns:a14="http://schemas.microsoft.com/office/drawing/2010/main" Requires="a14">
+      <mc:AlternateContent xmlns:mc="http://schemas.openxmlformats.org/markup-compatibility/2006" xmlns:a14="http://schemas.microsoft.com/office/drawing/2010/main">
+        <mc:Choice Requires="a14">
           <p:sp>
             <p:nvSpPr>
               <p:cNvPr id="126" name="TextBox 125">
@@ -11478,7 +11494,7 @@
             </p:txBody>
           </p:sp>
         </mc:Choice>
-        <mc:Fallback>
+        <mc:Fallback xmlns="">
           <p:sp>
             <p:nvSpPr>
               <p:cNvPr id="126" name="TextBox 125">
@@ -11523,8 +11539,8 @@
           </p:sp>
         </mc:Fallback>
       </mc:AlternateContent>
-      <mc:AlternateContent xmlns:mc="http://schemas.openxmlformats.org/markup-compatibility/2006">
-        <mc:Choice xmlns:a14="http://schemas.microsoft.com/office/drawing/2010/main" Requires="a14">
+      <mc:AlternateContent xmlns:mc="http://schemas.openxmlformats.org/markup-compatibility/2006" xmlns:a14="http://schemas.microsoft.com/office/drawing/2010/main">
+        <mc:Choice Requires="a14">
           <p:sp>
             <p:nvSpPr>
               <p:cNvPr id="132" name="TextBox 131">
@@ -11679,7 +11695,7 @@
             </p:txBody>
           </p:sp>
         </mc:Choice>
-        <mc:Fallback>
+        <mc:Fallback xmlns="">
           <p:sp>
             <p:nvSpPr>
               <p:cNvPr id="132" name="TextBox 131">
@@ -11724,8 +11740,8 @@
           </p:sp>
         </mc:Fallback>
       </mc:AlternateContent>
-      <mc:AlternateContent xmlns:mc="http://schemas.openxmlformats.org/markup-compatibility/2006">
-        <mc:Choice xmlns:a14="http://schemas.microsoft.com/office/drawing/2010/main" Requires="a14">
+      <mc:AlternateContent xmlns:mc="http://schemas.openxmlformats.org/markup-compatibility/2006" xmlns:a14="http://schemas.microsoft.com/office/drawing/2010/main">
+        <mc:Choice Requires="a14">
           <p:sp>
             <p:nvSpPr>
               <p:cNvPr id="134" name="Rectangle 133">
@@ -12054,7 +12070,7 @@
             </p:txBody>
           </p:sp>
         </mc:Choice>
-        <mc:Fallback>
+        <mc:Fallback xmlns="">
           <p:sp>
             <p:nvSpPr>
               <p:cNvPr id="134" name="Rectangle 133">
@@ -12371,8 +12387,8 @@
           </a:p>
         </p:txBody>
       </p:sp>
-      <mc:AlternateContent xmlns:mc="http://schemas.openxmlformats.org/markup-compatibility/2006">
-        <mc:Choice xmlns:a14="http://schemas.microsoft.com/office/drawing/2010/main" Requires="a14">
+      <mc:AlternateContent xmlns:mc="http://schemas.openxmlformats.org/markup-compatibility/2006" xmlns:a14="http://schemas.microsoft.com/office/drawing/2010/main">
+        <mc:Choice Requires="a14">
           <p:sp>
             <p:nvSpPr>
               <p:cNvPr id="28" name="TextBox 27">
@@ -12608,13 +12624,12 @@
                 </a:endParaRPr>
               </a:p>
               <a:p>
-                <a:pPr/>
                 <a:endParaRPr lang="en-US" sz="1050" dirty="0"/>
               </a:p>
             </p:txBody>
           </p:sp>
         </mc:Choice>
-        <mc:Fallback>
+        <mc:Fallback xmlns="">
           <p:sp>
             <p:nvSpPr>
               <p:cNvPr id="28" name="TextBox 27">
